--- a/corpus/pptx/images-anchored.pptx
+++ b/corpus/pptx/images-anchored.pptx
@@ -14,7 +14,7 @@
 
 <file path=ppt/slideLayouts/slideLayout1.xml><?xml version="1.0" encoding="utf-8"?>
 <p:sldLayout xmlns:a="http://schemas.openxmlformats.org/drawingml/2006/main" xmlns:r="http://schemas.openxmlformats.org/officeDocument/2006/relationships" xmlns:p="http://schemas.openxmlformats.org/presentationml/2006/main" type="obj" preserve="1">
-  <p:cSld>
+  <p:cSld name="Titulo y objetos">
     <p:spTree>
       <p:nvGrpSpPr>
         <p:cNvPr id="1" name=""/>
